--- a/m6/diapositivos/sessao-03-m6-f11.pptx
+++ b/m6/diapositivos/sessao-03-m6-f11.pptx
@@ -2638,7 +2638,143 @@
                 <a:ea typeface="Georgia" pitchFamily="34" charset="-122"/>
                 <a:cs typeface="Georgia" pitchFamily="34" charset="-120"/>
               </a:rPr>
-              <a:t>Duração: _______ Um documentário não é um manual: escolhe o que mostra, corta o que não serve e defende uma leitura. Ver bem é perceber a informação e as escolhas de quem filma. Escreve no caderno durante o visionamento (só palavras-chave; não tentes copiar tudo).</a:t>
+              <a:t>Duração: _______ Um documentário não é um manual: </a:t>
+            </a:r>
+            <a:pPr indent="0" marL="0">
+              <a:lnSpc>
+                <a:spcPct val="120000"/>
+              </a:lnSpc>
+              <a:buNone/>
+            </a:pPr>
+            <a:r>
+              <a:rPr lang="en-US" sz="2300" b="1" dirty="0">
+                <a:solidFill>
+                  <a:srgbClr val="F2F0EA"/>
+                </a:solidFill>
+                <a:latin typeface="Georgia" pitchFamily="34" charset="0"/>
+                <a:ea typeface="Georgia" pitchFamily="34" charset="-122"/>
+                <a:cs typeface="Georgia" pitchFamily="34" charset="-120"/>
+              </a:rPr>
+              <a:t>escolhe</a:t>
+            </a:r>
+            <a:pPr indent="0" marL="0">
+              <a:lnSpc>
+                <a:spcPct val="120000"/>
+              </a:lnSpc>
+              <a:buNone/>
+            </a:pPr>
+            <a:r>
+              <a:rPr lang="en-US" sz="2300" dirty="0">
+                <a:solidFill>
+                  <a:srgbClr val="F2F0EA"/>
+                </a:solidFill>
+                <a:latin typeface="Georgia" pitchFamily="34" charset="0"/>
+                <a:ea typeface="Georgia" pitchFamily="34" charset="-122"/>
+                <a:cs typeface="Georgia" pitchFamily="34" charset="-120"/>
+              </a:rPr>
+              <a:t> o que mostra, </a:t>
+            </a:r>
+            <a:pPr indent="0" marL="0">
+              <a:lnSpc>
+                <a:spcPct val="120000"/>
+              </a:lnSpc>
+              <a:buNone/>
+            </a:pPr>
+            <a:r>
+              <a:rPr lang="en-US" sz="2300" b="1" dirty="0">
+                <a:solidFill>
+                  <a:srgbClr val="F2F0EA"/>
+                </a:solidFill>
+                <a:latin typeface="Georgia" pitchFamily="34" charset="0"/>
+                <a:ea typeface="Georgia" pitchFamily="34" charset="-122"/>
+                <a:cs typeface="Georgia" pitchFamily="34" charset="-120"/>
+              </a:rPr>
+              <a:t>corta</a:t>
+            </a:r>
+            <a:pPr indent="0" marL="0">
+              <a:lnSpc>
+                <a:spcPct val="120000"/>
+              </a:lnSpc>
+              <a:buNone/>
+            </a:pPr>
+            <a:r>
+              <a:rPr lang="en-US" sz="2300" dirty="0">
+                <a:solidFill>
+                  <a:srgbClr val="F2F0EA"/>
+                </a:solidFill>
+                <a:latin typeface="Georgia" pitchFamily="34" charset="0"/>
+                <a:ea typeface="Georgia" pitchFamily="34" charset="-122"/>
+                <a:cs typeface="Georgia" pitchFamily="34" charset="-120"/>
+              </a:rPr>
+              <a:t> o que não serve e </a:t>
+            </a:r>
+            <a:pPr indent="0" marL="0">
+              <a:lnSpc>
+                <a:spcPct val="120000"/>
+              </a:lnSpc>
+              <a:buNone/>
+            </a:pPr>
+            <a:r>
+              <a:rPr lang="en-US" sz="2300" b="1" dirty="0">
+                <a:solidFill>
+                  <a:srgbClr val="F2F0EA"/>
+                </a:solidFill>
+                <a:latin typeface="Georgia" pitchFamily="34" charset="0"/>
+                <a:ea typeface="Georgia" pitchFamily="34" charset="-122"/>
+                <a:cs typeface="Georgia" pitchFamily="34" charset="-120"/>
+              </a:rPr>
+              <a:t>defende</a:t>
+            </a:r>
+            <a:pPr indent="0" marL="0">
+              <a:lnSpc>
+                <a:spcPct val="120000"/>
+              </a:lnSpc>
+              <a:buNone/>
+            </a:pPr>
+            <a:r>
+              <a:rPr lang="en-US" sz="2300" dirty="0">
+                <a:solidFill>
+                  <a:srgbClr val="F2F0EA"/>
+                </a:solidFill>
+                <a:latin typeface="Georgia" pitchFamily="34" charset="0"/>
+                <a:ea typeface="Georgia" pitchFamily="34" charset="-122"/>
+                <a:cs typeface="Georgia" pitchFamily="34" charset="-120"/>
+              </a:rPr>
+              <a:t> uma leitura. Ver bem é perceber a informação </a:t>
+            </a:r>
+            <a:pPr indent="0" marL="0">
+              <a:lnSpc>
+                <a:spcPct val="120000"/>
+              </a:lnSpc>
+              <a:buNone/>
+            </a:pPr>
+            <a:r>
+              <a:rPr lang="en-US" sz="2300" i="1" dirty="0">
+                <a:solidFill>
+                  <a:srgbClr val="F2F0EA"/>
+                </a:solidFill>
+                <a:latin typeface="Georgia" pitchFamily="34" charset="0"/>
+                <a:ea typeface="Georgia" pitchFamily="34" charset="-122"/>
+                <a:cs typeface="Georgia" pitchFamily="34" charset="-120"/>
+              </a:rPr>
+              <a:t>e</a:t>
+            </a:r>
+            <a:pPr indent="0" marL="0">
+              <a:lnSpc>
+                <a:spcPct val="120000"/>
+              </a:lnSpc>
+              <a:buNone/>
+            </a:pPr>
+            <a:r>
+              <a:rPr lang="en-US" sz="2300" dirty="0">
+                <a:solidFill>
+                  <a:srgbClr val="F2F0EA"/>
+                </a:solidFill>
+                <a:latin typeface="Georgia" pitchFamily="34" charset="0"/>
+                <a:ea typeface="Georgia" pitchFamily="34" charset="-122"/>
+                <a:cs typeface="Georgia" pitchFamily="34" charset="-120"/>
+              </a:rPr>
+              <a:t> as escolhas de quem filma. Escreve no caderno durante o visionamento (só palavras-chave; não tentes copiar tudo).</a:t>
             </a:r>
             <a:endParaRPr lang="en-US" sz="2300" dirty="0"/>
           </a:p>
@@ -3045,7 +3181,41 @@
                 <a:ea typeface="Arial" pitchFamily="34" charset="-122"/>
                 <a:cs typeface="Arial" pitchFamily="34" charset="-120"/>
               </a:rPr>
-              <a:t>Cesário Verde nasceu em Lisboa em 1855 e morreu em 1886, aos 31 anos, sem publicar um livro; o seu Livro saiu em 1887, organizado por Silva Pinto.</a:t>
+              <a:t>Cesário Verde nasceu em Lisboa em 1855 e morreu em 1886, aos 31 anos, sem publicar um livro; o seu </a:t>
+            </a:r>
+            <a:pPr indent="0" marL="0">
+              <a:lnSpc>
+                <a:spcPct val="105000"/>
+              </a:lnSpc>
+              <a:buNone/>
+            </a:pPr>
+            <a:r>
+              <a:rPr lang="en-US" sz="2200" i="1" dirty="0">
+                <a:solidFill>
+                  <a:srgbClr val="F2F0EA"/>
+                </a:solidFill>
+                <a:latin typeface="Arial" pitchFamily="34" charset="0"/>
+                <a:ea typeface="Arial" pitchFamily="34" charset="-122"/>
+                <a:cs typeface="Arial" pitchFamily="34" charset="-120"/>
+              </a:rPr>
+              <a:t>Livro</a:t>
+            </a:r>
+            <a:pPr indent="0" marL="0">
+              <a:lnSpc>
+                <a:spcPct val="105000"/>
+              </a:lnSpc>
+              <a:buNone/>
+            </a:pPr>
+            <a:r>
+              <a:rPr lang="en-US" sz="2200" dirty="0">
+                <a:solidFill>
+                  <a:srgbClr val="F2F0EA"/>
+                </a:solidFill>
+                <a:latin typeface="Arial" pitchFamily="34" charset="0"/>
+                <a:ea typeface="Arial" pitchFamily="34" charset="-122"/>
+                <a:cs typeface="Arial" pitchFamily="34" charset="-120"/>
+              </a:rPr>
+              <a:t> saiu em 1887, organizado por Silva Pinto.</a:t>
             </a:r>
             <a:endParaRPr lang="en-US" sz="2200" dirty="0"/>
           </a:p>
@@ -3153,7 +3323,41 @@
                 <a:ea typeface="Arial" pitchFamily="34" charset="-122"/>
                 <a:cs typeface="Arial" pitchFamily="34" charset="-120"/>
               </a:rPr>
-              <a:t>Um documentário da série «Grandes Livros» (RTP) conta esta vida; como qualquer documentário, escolhe o que mostra, corta o que não serve e defende uma leitura.</a:t>
+              <a:t>Um documentário da série </a:t>
+            </a:r>
+            <a:pPr indent="0" marL="0">
+              <a:lnSpc>
+                <a:spcPct val="105000"/>
+              </a:lnSpc>
+              <a:buNone/>
+            </a:pPr>
+            <a:r>
+              <a:rPr lang="en-US" sz="2200" i="1" dirty="0">
+                <a:solidFill>
+                  <a:srgbClr val="F2F0EA"/>
+                </a:solidFill>
+                <a:latin typeface="Arial" pitchFamily="34" charset="0"/>
+                <a:ea typeface="Arial" pitchFamily="34" charset="-122"/>
+                <a:cs typeface="Arial" pitchFamily="34" charset="-120"/>
+              </a:rPr>
+              <a:t>Grandes Livros</a:t>
+            </a:r>
+            <a:pPr indent="0" marL="0">
+              <a:lnSpc>
+                <a:spcPct val="105000"/>
+              </a:lnSpc>
+              <a:buNone/>
+            </a:pPr>
+            <a:r>
+              <a:rPr lang="en-US" sz="2200" dirty="0">
+                <a:solidFill>
+                  <a:srgbClr val="F2F0EA"/>
+                </a:solidFill>
+                <a:latin typeface="Arial" pitchFamily="34" charset="0"/>
+                <a:ea typeface="Arial" pitchFamily="34" charset="-122"/>
+                <a:cs typeface="Arial" pitchFamily="34" charset="-120"/>
+              </a:rPr>
+              <a:t> (RTP) conta esta vida; como qualquer documentário, escolhe o que mostra, corta o que não serve e defende uma leitura.</a:t>
             </a:r>
             <a:endParaRPr lang="en-US" sz="2200" dirty="0"/>
           </a:p>
@@ -3791,7 +3995,35 @@
                           <a:ea typeface="Arial" pitchFamily="34" charset="-122"/>
                           <a:cs typeface="Arial" pitchFamily="34" charset="-120"/>
                         </a:rPr>
-                        <a:t>O que se diz do Livro e da sua publicação</a:t>
+                        <a:t>O que se diz do </a:t>
+                      </a:r>
+                      <a:pPr indent="0" marL="0">
+                        <a:buNone/>
+                      </a:pPr>
+                      <a:r>
+                        <a:rPr lang="en-US" sz="1800" i="1" dirty="0">
+                          <a:solidFill>
+                            <a:srgbClr val="F2F0EA"/>
+                          </a:solidFill>
+                          <a:latin typeface="Arial" pitchFamily="34" charset="0"/>
+                          <a:ea typeface="Arial" pitchFamily="34" charset="-122"/>
+                          <a:cs typeface="Arial" pitchFamily="34" charset="-120"/>
+                        </a:rPr>
+                        <a:t>Livro</a:t>
+                      </a:r>
+                      <a:pPr indent="0" marL="0">
+                        <a:buNone/>
+                      </a:pPr>
+                      <a:r>
+                        <a:rPr lang="en-US" sz="1800" dirty="0">
+                          <a:solidFill>
+                            <a:srgbClr val="F2F0EA"/>
+                          </a:solidFill>
+                          <a:latin typeface="Arial" pitchFamily="34" charset="0"/>
+                          <a:ea typeface="Arial" pitchFamily="34" charset="-122"/>
+                          <a:cs typeface="Arial" pitchFamily="34" charset="-120"/>
+                        </a:rPr>
+                        <a:t> e da sua publicação</a:t>
                       </a:r>
                       <a:endParaRPr lang="en-US" sz="1800" dirty="0">
                         <a:latin typeface="Arial" charset="0"/>
@@ -4494,7 +4726,7 @@
               <a:buNone/>
             </a:pPr>
             <a:r>
-              <a:rPr lang="en-US" sz="2300" dirty="0">
+              <a:rPr lang="en-US" sz="2300" b="1" dirty="0">
                 <a:solidFill>
                   <a:srgbClr val="F2F0EA"/>
                 </a:solidFill>
@@ -4502,7 +4734,227 @@
                 <a:ea typeface="Georgia" pitchFamily="34" charset="-122"/>
                 <a:cs typeface="Georgia" pitchFamily="34" charset="-120"/>
               </a:rPr>
-              <a:t>José Joaquim Cesário Verde nasceu em Lisboa a 25 de fevereiro de 1855 e morreu a 19 de julho de 1886, de tuberculose, com 31 anos. Trabalhou no comércio da família e publicou poemas dispersos em jornais; não publicou nenhum livro em vida. O Livro de Cesário Verde é uma edição póstuma, organizada pelo amigo Silva Pinto em 1887 (Typographia Elzeveriana), numa tiragem de 200 exemplares que não foi posta à venda.</a:t>
+              <a:t>José Joaquim Cesário Verde</a:t>
+            </a:r>
+            <a:pPr indent="0" marL="0">
+              <a:lnSpc>
+                <a:spcPct val="120000"/>
+              </a:lnSpc>
+              <a:spcAft>
+                <a:spcPts val="1000"/>
+              </a:spcAft>
+              <a:buNone/>
+            </a:pPr>
+            <a:r>
+              <a:rPr lang="en-US" sz="2300" dirty="0">
+                <a:solidFill>
+                  <a:srgbClr val="F2F0EA"/>
+                </a:solidFill>
+                <a:latin typeface="Georgia" pitchFamily="34" charset="0"/>
+                <a:ea typeface="Georgia" pitchFamily="34" charset="-122"/>
+                <a:cs typeface="Georgia" pitchFamily="34" charset="-120"/>
+              </a:rPr>
+              <a:t> nasceu em Lisboa a 25 de fevereiro de 1855 e morreu a 19 de julho de 1886, de tuberculose, com 31 anos. Trabalhou no comércio da família e publicou poemas dispersos em jornais; </a:t>
+            </a:r>
+            <a:pPr indent="0" marL="0">
+              <a:lnSpc>
+                <a:spcPct val="120000"/>
+              </a:lnSpc>
+              <a:spcAft>
+                <a:spcPts val="1000"/>
+              </a:spcAft>
+              <a:buNone/>
+            </a:pPr>
+            <a:r>
+              <a:rPr lang="en-US" sz="2300" b="1" dirty="0">
+                <a:solidFill>
+                  <a:srgbClr val="F2F0EA"/>
+                </a:solidFill>
+                <a:latin typeface="Georgia" pitchFamily="34" charset="0"/>
+                <a:ea typeface="Georgia" pitchFamily="34" charset="-122"/>
+                <a:cs typeface="Georgia" pitchFamily="34" charset="-120"/>
+              </a:rPr>
+              <a:t>não publicou nenhum livro em vida</a:t>
+            </a:r>
+            <a:pPr indent="0" marL="0">
+              <a:lnSpc>
+                <a:spcPct val="120000"/>
+              </a:lnSpc>
+              <a:spcAft>
+                <a:spcPts val="1000"/>
+              </a:spcAft>
+              <a:buNone/>
+            </a:pPr>
+            <a:r>
+              <a:rPr lang="en-US" sz="2300" dirty="0">
+                <a:solidFill>
+                  <a:srgbClr val="F2F0EA"/>
+                </a:solidFill>
+                <a:latin typeface="Georgia" pitchFamily="34" charset="0"/>
+                <a:ea typeface="Georgia" pitchFamily="34" charset="-122"/>
+                <a:cs typeface="Georgia" pitchFamily="34" charset="-120"/>
+              </a:rPr>
+              <a:t>. </a:t>
+            </a:r>
+            <a:pPr indent="0" marL="0">
+              <a:lnSpc>
+                <a:spcPct val="120000"/>
+              </a:lnSpc>
+              <a:spcAft>
+                <a:spcPts val="1000"/>
+              </a:spcAft>
+              <a:buNone/>
+            </a:pPr>
+            <a:r>
+              <a:rPr lang="en-US" sz="2300" i="1" dirty="0">
+                <a:solidFill>
+                  <a:srgbClr val="F2F0EA"/>
+                </a:solidFill>
+                <a:latin typeface="Georgia" pitchFamily="34" charset="0"/>
+                <a:ea typeface="Georgia" pitchFamily="34" charset="-122"/>
+                <a:cs typeface="Georgia" pitchFamily="34" charset="-120"/>
+              </a:rPr>
+              <a:t>O Livro de Cesário Verde</a:t>
+            </a:r>
+            <a:pPr indent="0" marL="0">
+              <a:lnSpc>
+                <a:spcPct val="120000"/>
+              </a:lnSpc>
+              <a:spcAft>
+                <a:spcPts val="1000"/>
+              </a:spcAft>
+              <a:buNone/>
+            </a:pPr>
+            <a:r>
+              <a:rPr lang="en-US" sz="2300" dirty="0">
+                <a:solidFill>
+                  <a:srgbClr val="F2F0EA"/>
+                </a:solidFill>
+                <a:latin typeface="Georgia" pitchFamily="34" charset="0"/>
+                <a:ea typeface="Georgia" pitchFamily="34" charset="-122"/>
+                <a:cs typeface="Georgia" pitchFamily="34" charset="-120"/>
+              </a:rPr>
+              <a:t> é uma edição </a:t>
+            </a:r>
+            <a:pPr indent="0" marL="0">
+              <a:lnSpc>
+                <a:spcPct val="120000"/>
+              </a:lnSpc>
+              <a:spcAft>
+                <a:spcPts val="1000"/>
+              </a:spcAft>
+              <a:buNone/>
+            </a:pPr>
+            <a:r>
+              <a:rPr lang="en-US" sz="2300" b="1" dirty="0">
+                <a:solidFill>
+                  <a:srgbClr val="F2F0EA"/>
+                </a:solidFill>
+                <a:latin typeface="Georgia" pitchFamily="34" charset="0"/>
+                <a:ea typeface="Georgia" pitchFamily="34" charset="-122"/>
+                <a:cs typeface="Georgia" pitchFamily="34" charset="-120"/>
+              </a:rPr>
+              <a:t>póstuma</a:t>
+            </a:r>
+            <a:pPr indent="0" marL="0">
+              <a:lnSpc>
+                <a:spcPct val="120000"/>
+              </a:lnSpc>
+              <a:spcAft>
+                <a:spcPts val="1000"/>
+              </a:spcAft>
+              <a:buNone/>
+            </a:pPr>
+            <a:r>
+              <a:rPr lang="en-US" sz="2300" dirty="0">
+                <a:solidFill>
+                  <a:srgbClr val="F2F0EA"/>
+                </a:solidFill>
+                <a:latin typeface="Georgia" pitchFamily="34" charset="0"/>
+                <a:ea typeface="Georgia" pitchFamily="34" charset="-122"/>
+                <a:cs typeface="Georgia" pitchFamily="34" charset="-120"/>
+              </a:rPr>
+              <a:t>, organizada pelo amigo </a:t>
+            </a:r>
+            <a:pPr indent="0" marL="0">
+              <a:lnSpc>
+                <a:spcPct val="120000"/>
+              </a:lnSpc>
+              <a:spcAft>
+                <a:spcPts val="1000"/>
+              </a:spcAft>
+              <a:buNone/>
+            </a:pPr>
+            <a:r>
+              <a:rPr lang="en-US" sz="2300" b="1" dirty="0">
+                <a:solidFill>
+                  <a:srgbClr val="F2F0EA"/>
+                </a:solidFill>
+                <a:latin typeface="Georgia" pitchFamily="34" charset="0"/>
+                <a:ea typeface="Georgia" pitchFamily="34" charset="-122"/>
+                <a:cs typeface="Georgia" pitchFamily="34" charset="-120"/>
+              </a:rPr>
+              <a:t>Silva Pinto</a:t>
+            </a:r>
+            <a:pPr indent="0" marL="0">
+              <a:lnSpc>
+                <a:spcPct val="120000"/>
+              </a:lnSpc>
+              <a:spcAft>
+                <a:spcPts val="1000"/>
+              </a:spcAft>
+              <a:buNone/>
+            </a:pPr>
+            <a:r>
+              <a:rPr lang="en-US" sz="2300" dirty="0">
+                <a:solidFill>
+                  <a:srgbClr val="F2F0EA"/>
+                </a:solidFill>
+                <a:latin typeface="Georgia" pitchFamily="34" charset="0"/>
+                <a:ea typeface="Georgia" pitchFamily="34" charset="-122"/>
+                <a:cs typeface="Georgia" pitchFamily="34" charset="-120"/>
+              </a:rPr>
+              <a:t> em </a:t>
+            </a:r>
+            <a:pPr indent="0" marL="0">
+              <a:lnSpc>
+                <a:spcPct val="120000"/>
+              </a:lnSpc>
+              <a:spcAft>
+                <a:spcPts val="1000"/>
+              </a:spcAft>
+              <a:buNone/>
+            </a:pPr>
+            <a:r>
+              <a:rPr lang="en-US" sz="2300" b="1" dirty="0">
+                <a:solidFill>
+                  <a:srgbClr val="F2F0EA"/>
+                </a:solidFill>
+                <a:latin typeface="Georgia" pitchFamily="34" charset="0"/>
+                <a:ea typeface="Georgia" pitchFamily="34" charset="-122"/>
+                <a:cs typeface="Georgia" pitchFamily="34" charset="-120"/>
+              </a:rPr>
+              <a:t>1887</a:t>
+            </a:r>
+            <a:pPr indent="0" marL="0">
+              <a:lnSpc>
+                <a:spcPct val="120000"/>
+              </a:lnSpc>
+              <a:spcAft>
+                <a:spcPts val="1000"/>
+              </a:spcAft>
+              <a:buNone/>
+            </a:pPr>
+            <a:r>
+              <a:rPr lang="en-US" sz="2300" dirty="0">
+                <a:solidFill>
+                  <a:srgbClr val="F2F0EA"/>
+                </a:solidFill>
+                <a:latin typeface="Georgia" pitchFamily="34" charset="0"/>
+                <a:ea typeface="Georgia" pitchFamily="34" charset="-122"/>
+                <a:cs typeface="Georgia" pitchFamily="34" charset="-120"/>
+              </a:rPr>
+              <a:t> (Typographia Elzeveriana), numa tiragem de 200 exemplares que não foi posta à venda.</a:t>
             </a:r>
             <a:endParaRPr lang="en-US" sz="2300" dirty="0"/>
           </a:p>
